--- a/internship project.pptx
+++ b/internship project.pptx
@@ -3122,7 +3122,7 @@
                 </a:solidFill>
                 <a:latin typeface="Franklin Gothic Book" panose="020B0503020102020204"/>
               </a:rPr>
-              <a:t>https://www.kaggle.com/datasets/vishardmehta/indian-engineering-college-placement-dataset  </a:t>
+              <a:t>https://www.kaggle.com/datasets/thikarivignesh/engineering-student-placement-analytics </a:t>
             </a:r>
             <a:endParaRPr lang="en-US" altLang="en-US" sz="2200" u="sng">
               <a:solidFill>
